--- a/Project Files/Bouncing Ball Game PPT.pptx
+++ b/Project Files/Bouncing Ball Game PPT.pptx
@@ -491,7 +491,7 @@
             <a:fld id="{1D8BD707-D9CF-40AE-B4C6-C98DA3205C09}" type="datetimeFigureOut">
               <a:rPr lang="en-US" smtClean="0"/>
               <a:pPr/>
-              <a:t>8/28/2025</a:t>
+              <a:t>10/22/2025</a:t>
             </a:fld>
             <a:endParaRPr lang="en-US"/>
           </a:p>
@@ -817,7 +817,7 @@
             <a:fld id="{1D8BD707-D9CF-40AE-B4C6-C98DA3205C09}" type="datetimeFigureOut">
               <a:rPr lang="en-US" smtClean="0"/>
               <a:pPr/>
-              <a:t>8/28/2025</a:t>
+              <a:t>10/22/2025</a:t>
             </a:fld>
             <a:endParaRPr lang="en-US"/>
           </a:p>
@@ -1067,7 +1067,7 @@
             <a:fld id="{1D8BD707-D9CF-40AE-B4C6-C98DA3205C09}" type="datetimeFigureOut">
               <a:rPr lang="en-US" smtClean="0"/>
               <a:pPr/>
-              <a:t>8/28/2025</a:t>
+              <a:t>10/22/2025</a:t>
             </a:fld>
             <a:endParaRPr lang="en-US"/>
           </a:p>
@@ -1408,7 +1408,7 @@
             <a:fld id="{1D8BD707-D9CF-40AE-B4C6-C98DA3205C09}" type="datetimeFigureOut">
               <a:rPr lang="en-US" smtClean="0"/>
               <a:pPr/>
-              <a:t>8/28/2025</a:t>
+              <a:t>10/22/2025</a:t>
             </a:fld>
             <a:endParaRPr lang="en-US"/>
           </a:p>
@@ -1757,7 +1757,7 @@
             <a:fld id="{1D8BD707-D9CF-40AE-B4C6-C98DA3205C09}" type="datetimeFigureOut">
               <a:rPr lang="en-US" smtClean="0"/>
               <a:pPr/>
-              <a:t>8/28/2025</a:t>
+              <a:t>10/22/2025</a:t>
             </a:fld>
             <a:endParaRPr lang="en-US"/>
           </a:p>
@@ -2133,7 +2133,7 @@
             <a:fld id="{1D8BD707-D9CF-40AE-B4C6-C98DA3205C09}" type="datetimeFigureOut">
               <a:rPr lang="en-US" smtClean="0"/>
               <a:pPr/>
-              <a:t>8/28/2025</a:t>
+              <a:t>10/22/2025</a:t>
             </a:fld>
             <a:endParaRPr lang="en-US"/>
           </a:p>
@@ -2605,7 +2605,7 @@
             <a:fld id="{1D8BD707-D9CF-40AE-B4C6-C98DA3205C09}" type="datetimeFigureOut">
               <a:rPr lang="en-US" smtClean="0"/>
               <a:pPr/>
-              <a:t>8/28/2025</a:t>
+              <a:t>10/22/2025</a:t>
             </a:fld>
             <a:endParaRPr lang="en-US"/>
           </a:p>
@@ -2812,7 +2812,7 @@
             <a:fld id="{1D8BD707-D9CF-40AE-B4C6-C98DA3205C09}" type="datetimeFigureOut">
               <a:rPr lang="en-US" smtClean="0"/>
               <a:pPr/>
-              <a:t>8/28/2025</a:t>
+              <a:t>10/22/2025</a:t>
             </a:fld>
             <a:endParaRPr lang="en-US"/>
           </a:p>
@@ -3025,7 +3025,7 @@
             <a:fld id="{1D8BD707-D9CF-40AE-B4C6-C98DA3205C09}" type="datetimeFigureOut">
               <a:rPr lang="en-US" smtClean="0"/>
               <a:pPr/>
-              <a:t>8/28/2025</a:t>
+              <a:t>10/22/2025</a:t>
             </a:fld>
             <a:endParaRPr lang="en-US"/>
           </a:p>
@@ -3259,7 +3259,7 @@
             <a:fld id="{1D8BD707-D9CF-40AE-B4C6-C98DA3205C09}" type="datetimeFigureOut">
               <a:rPr lang="en-US" smtClean="0"/>
               <a:pPr/>
-              <a:t>8/28/2025</a:t>
+              <a:t>10/22/2025</a:t>
             </a:fld>
             <a:endParaRPr lang="en-US"/>
           </a:p>
@@ -3509,7 +3509,7 @@
             <a:fld id="{1D8BD707-D9CF-40AE-B4C6-C98DA3205C09}" type="datetimeFigureOut">
               <a:rPr lang="en-US" smtClean="0"/>
               <a:pPr/>
-              <a:t>8/28/2025</a:t>
+              <a:t>10/22/2025</a:t>
             </a:fld>
             <a:endParaRPr lang="en-US"/>
           </a:p>
@@ -3809,7 +3809,7 @@
             <a:fld id="{1D8BD707-D9CF-40AE-B4C6-C98DA3205C09}" type="datetimeFigureOut">
               <a:rPr lang="en-US" smtClean="0"/>
               <a:pPr/>
-              <a:t>8/28/2025</a:t>
+              <a:t>10/22/2025</a:t>
             </a:fld>
             <a:endParaRPr lang="en-US"/>
           </a:p>
@@ -4205,7 +4205,7 @@
             <a:fld id="{1D8BD707-D9CF-40AE-B4C6-C98DA3205C09}" type="datetimeFigureOut">
               <a:rPr lang="en-US" smtClean="0"/>
               <a:pPr/>
-              <a:t>8/28/2025</a:t>
+              <a:t>10/22/2025</a:t>
             </a:fld>
             <a:endParaRPr lang="en-US"/>
           </a:p>
@@ -4356,7 +4356,7 @@
             <a:fld id="{1D8BD707-D9CF-40AE-B4C6-C98DA3205C09}" type="datetimeFigureOut">
               <a:rPr lang="en-US" smtClean="0"/>
               <a:pPr/>
-              <a:t>8/28/2025</a:t>
+              <a:t>10/22/2025</a:t>
             </a:fld>
             <a:endParaRPr lang="en-US"/>
           </a:p>
@@ -4484,7 +4484,7 @@
             <a:fld id="{1D8BD707-D9CF-40AE-B4C6-C98DA3205C09}" type="datetimeFigureOut">
               <a:rPr lang="en-US" smtClean="0"/>
               <a:pPr/>
-              <a:t>8/28/2025</a:t>
+              <a:t>10/22/2025</a:t>
             </a:fld>
             <a:endParaRPr lang="en-US"/>
           </a:p>
@@ -4741,7 +4741,7 @@
             <a:fld id="{1D8BD707-D9CF-40AE-B4C6-C98DA3205C09}" type="datetimeFigureOut">
               <a:rPr lang="en-US" smtClean="0"/>
               <a:pPr/>
-              <a:t>8/28/2025</a:t>
+              <a:t>10/22/2025</a:t>
             </a:fld>
             <a:endParaRPr lang="en-US"/>
           </a:p>
@@ -5058,7 +5058,7 @@
             <a:fld id="{1D8BD707-D9CF-40AE-B4C6-C98DA3205C09}" type="datetimeFigureOut">
               <a:rPr lang="en-US" smtClean="0"/>
               <a:pPr/>
-              <a:t>8/28/2025</a:t>
+              <a:t>10/22/2025</a:t>
             </a:fld>
             <a:endParaRPr lang="en-US"/>
           </a:p>
@@ -5411,7 +5411,7 @@
             <a:fld id="{1D8BD707-D9CF-40AE-B4C6-C98DA3205C09}" type="datetimeFigureOut">
               <a:rPr lang="en-US" smtClean="0"/>
               <a:pPr/>
-              <a:t>8/28/2025</a:t>
+              <a:t>10/22/2025</a:t>
             </a:fld>
             <a:endParaRPr lang="en-US"/>
           </a:p>
@@ -6191,6 +6191,13 @@
             </a:stretch>
           </a:blipFill>
         </p:spPr>
+        <p:txBody>
+          <a:bodyPr/>
+          <a:lstStyle/>
+          <a:p>
+            <a:endParaRPr lang="en-IN" dirty="0"/>
+          </a:p>
+        </p:txBody>
       </p:sp>
       <p:sp>
         <p:nvSpPr>
@@ -6465,7 +6472,7 @@
         <p:spPr>
           <a:xfrm>
             <a:off x="1020426" y="8700026"/>
-            <a:ext cx="5389295" cy="539177"/>
+            <a:ext cx="5389295" cy="536429"/>
           </a:xfrm>
           <a:prstGeom prst="rect">
             <a:avLst/>
@@ -6483,7 +6490,7 @@
               </a:lnSpc>
             </a:pPr>
             <a:r>
-              <a:rPr lang="en-US" sz="3147" b="1">
+              <a:rPr lang="en-US" sz="3147" b="1" dirty="0">
                 <a:solidFill>
                   <a:srgbClr val="000000"/>
                 </a:solidFill>
@@ -6506,7 +6513,7 @@
         <p:spPr>
           <a:xfrm>
             <a:off x="1028700" y="9172528"/>
-            <a:ext cx="5389295" cy="539177"/>
+            <a:ext cx="5389295" cy="1100686"/>
           </a:xfrm>
           <a:prstGeom prst="rect">
             <a:avLst/>
@@ -6523,18 +6530,31 @@
                 <a:spcPts val="4406"/>
               </a:lnSpc>
             </a:pPr>
-            <a:r>
-              <a:rPr lang="en-US" sz="3147" b="1">
-                <a:solidFill>
-                  <a:srgbClr val="000000"/>
-                </a:solidFill>
-                <a:latin typeface="Atkinson Hyperlegible Bold"/>
-                <a:ea typeface="Atkinson Hyperlegible Bold"/>
-                <a:cs typeface="Atkinson Hyperlegible Bold"/>
-                <a:sym typeface="Atkinson Hyperlegible Bold"/>
-              </a:rPr>
-              <a:t>Ms. Arushi Gupta</a:t>
-            </a:r>
+            <a:endParaRPr lang="en-US" sz="3147" b="1" dirty="0">
+              <a:solidFill>
+                <a:srgbClr val="000000"/>
+              </a:solidFill>
+              <a:latin typeface="Atkinson Hyperlegible Bold"/>
+              <a:ea typeface="Atkinson Hyperlegible Bold"/>
+              <a:cs typeface="Atkinson Hyperlegible Bold"/>
+              <a:sym typeface="Atkinson Hyperlegible Bold"/>
+            </a:endParaRPr>
+          </a:p>
+          <a:p>
+            <a:pPr algn="ctr">
+              <a:lnSpc>
+                <a:spcPts val="4406"/>
+              </a:lnSpc>
+            </a:pPr>
+            <a:endParaRPr lang="en-US" sz="3147" b="1" dirty="0">
+              <a:solidFill>
+                <a:srgbClr val="000000"/>
+              </a:solidFill>
+              <a:latin typeface="Atkinson Hyperlegible Bold"/>
+              <a:ea typeface="Atkinson Hyperlegible Bold"/>
+              <a:cs typeface="Atkinson Hyperlegible Bold"/>
+              <a:sym typeface="Atkinson Hyperlegible Bold"/>
+            </a:endParaRPr>
           </a:p>
         </p:txBody>
       </p:sp>
